--- a/examples/demo_tech_deck.pptx
+++ b/examples/demo_tech_deck.pptx
@@ -137,7 +137,7 @@
               <c:strCache>
                 <c:ptCount val="1"/>
                 <c:pt idx="0">
-                  <c:v>Valore</c:v>
+                  <c:v>Value</c:v>
                 </c:pt>
               </c:strCache>
             </c:strRef>
